--- a/Lent_Frankenstein.pptx
+++ b/Lent_Frankenstein.pptx
@@ -10,6 +10,10 @@
     <p:sldId id="258" r:id="rId4"/>
     <p:sldId id="259" r:id="rId5"/>
     <p:sldId id="260" r:id="rId6"/>
+    <p:sldId id="261" r:id="rId7"/>
+    <p:sldId id="263" r:id="rId8"/>
+    <p:sldId id="264" r:id="rId9"/>
+    <p:sldId id="262" r:id="rId10"/>
   </p:sldIdLst>
   <p:sldSz cx="12192000" cy="6858000"/>
   <p:notesSz cx="6858000" cy="9144000"/>
@@ -108,6 +112,11 @@
       </a:defRPr>
     </a:lvl9pPr>
   </p:defaultTextStyle>
+  <p:extLst>
+    <p:ext uri="{EFAFB233-063F-42B5-8137-9DF3F51BA10A}">
+      <p15:sldGuideLst xmlns:p15="http://schemas.microsoft.com/office/powerpoint/2012/main"/>
+    </p:ext>
+  </p:extLst>
 </p:presentation>
 </file>
 
@@ -270,7 +279,7 @@
           <a:p>
             <a:fld id="{0992BFB6-1FC3-41CB-8C42-49EFF6365BE4}" type="datetimeFigureOut">
               <a:rPr lang="ru-RU" smtClean="0"/>
-              <a:t>18.05.2026</a:t>
+              <a:t>19.05.2026</a:t>
             </a:fld>
             <a:endParaRPr lang="ru-RU"/>
           </a:p>
@@ -468,7 +477,7 @@
           <a:p>
             <a:fld id="{0992BFB6-1FC3-41CB-8C42-49EFF6365BE4}" type="datetimeFigureOut">
               <a:rPr lang="ru-RU" smtClean="0"/>
-              <a:t>18.05.2026</a:t>
+              <a:t>19.05.2026</a:t>
             </a:fld>
             <a:endParaRPr lang="ru-RU"/>
           </a:p>
@@ -676,7 +685,7 @@
           <a:p>
             <a:fld id="{0992BFB6-1FC3-41CB-8C42-49EFF6365BE4}" type="datetimeFigureOut">
               <a:rPr lang="ru-RU" smtClean="0"/>
-              <a:t>18.05.2026</a:t>
+              <a:t>19.05.2026</a:t>
             </a:fld>
             <a:endParaRPr lang="ru-RU"/>
           </a:p>
@@ -874,7 +883,7 @@
           <a:p>
             <a:fld id="{0992BFB6-1FC3-41CB-8C42-49EFF6365BE4}" type="datetimeFigureOut">
               <a:rPr lang="ru-RU" smtClean="0"/>
-              <a:t>18.05.2026</a:t>
+              <a:t>19.05.2026</a:t>
             </a:fld>
             <a:endParaRPr lang="ru-RU"/>
           </a:p>
@@ -1149,7 +1158,7 @@
           <a:p>
             <a:fld id="{0992BFB6-1FC3-41CB-8C42-49EFF6365BE4}" type="datetimeFigureOut">
               <a:rPr lang="ru-RU" smtClean="0"/>
-              <a:t>18.05.2026</a:t>
+              <a:t>19.05.2026</a:t>
             </a:fld>
             <a:endParaRPr lang="ru-RU"/>
           </a:p>
@@ -1414,7 +1423,7 @@
           <a:p>
             <a:fld id="{0992BFB6-1FC3-41CB-8C42-49EFF6365BE4}" type="datetimeFigureOut">
               <a:rPr lang="ru-RU" smtClean="0"/>
-              <a:t>18.05.2026</a:t>
+              <a:t>19.05.2026</a:t>
             </a:fld>
             <a:endParaRPr lang="ru-RU"/>
           </a:p>
@@ -1826,7 +1835,7 @@
           <a:p>
             <a:fld id="{0992BFB6-1FC3-41CB-8C42-49EFF6365BE4}" type="datetimeFigureOut">
               <a:rPr lang="ru-RU" smtClean="0"/>
-              <a:t>18.05.2026</a:t>
+              <a:t>19.05.2026</a:t>
             </a:fld>
             <a:endParaRPr lang="ru-RU"/>
           </a:p>
@@ -1967,7 +1976,7 @@
           <a:p>
             <a:fld id="{0992BFB6-1FC3-41CB-8C42-49EFF6365BE4}" type="datetimeFigureOut">
               <a:rPr lang="ru-RU" smtClean="0"/>
-              <a:t>18.05.2026</a:t>
+              <a:t>19.05.2026</a:t>
             </a:fld>
             <a:endParaRPr lang="ru-RU"/>
           </a:p>
@@ -2080,7 +2089,7 @@
           <a:p>
             <a:fld id="{0992BFB6-1FC3-41CB-8C42-49EFF6365BE4}" type="datetimeFigureOut">
               <a:rPr lang="ru-RU" smtClean="0"/>
-              <a:t>18.05.2026</a:t>
+              <a:t>19.05.2026</a:t>
             </a:fld>
             <a:endParaRPr lang="ru-RU"/>
           </a:p>
@@ -2391,7 +2400,7 @@
           <a:p>
             <a:fld id="{0992BFB6-1FC3-41CB-8C42-49EFF6365BE4}" type="datetimeFigureOut">
               <a:rPr lang="ru-RU" smtClean="0"/>
-              <a:t>18.05.2026</a:t>
+              <a:t>19.05.2026</a:t>
             </a:fld>
             <a:endParaRPr lang="ru-RU"/>
           </a:p>
@@ -2679,7 +2688,7 @@
           <a:p>
             <a:fld id="{0992BFB6-1FC3-41CB-8C42-49EFF6365BE4}" type="datetimeFigureOut">
               <a:rPr lang="ru-RU" smtClean="0"/>
-              <a:t>18.05.2026</a:t>
+              <a:t>19.05.2026</a:t>
             </a:fld>
             <a:endParaRPr lang="ru-RU"/>
           </a:p>
@@ -2920,7 +2929,7 @@
           <a:p>
             <a:fld id="{0992BFB6-1FC3-41CB-8C42-49EFF6365BE4}" type="datetimeFigureOut">
               <a:rPr lang="ru-RU" smtClean="0"/>
-              <a:t>18.05.2026</a:t>
+              <a:t>19.05.2026</a:t>
             </a:fld>
             <a:endParaRPr lang="ru-RU"/>
           </a:p>
@@ -3526,43 +3535,6 @@
           </a:p>
         </p:txBody>
       </p:sp>
-      <p:pic>
-        <p:nvPicPr>
-          <p:cNvPr id="7" name="Рисунок 6">
-            <a:extLst>
-              <a:ext uri="{FF2B5EF4-FFF2-40B4-BE49-F238E27FC236}">
-                <a16:creationId xmlns:a16="http://schemas.microsoft.com/office/drawing/2014/main" id="{F8ED3508-731B-4E3A-A070-30027FC2CBDE}"/>
-              </a:ext>
-            </a:extLst>
-          </p:cNvPr>
-          <p:cNvPicPr>
-            <a:picLocks noChangeAspect="1"/>
-          </p:cNvPicPr>
-          <p:nvPr/>
-        </p:nvPicPr>
-        <p:blipFill>
-          <a:blip r:embed="rId3">
-            <a:alphaModFix/>
-            <a:extLst>
-              <a:ext uri="{28A0092B-C50C-407E-A947-70E740481C1C}">
-                <a14:useLocalDpi xmlns:a14="http://schemas.microsoft.com/office/drawing/2010/main" val="0"/>
-              </a:ext>
-            </a:extLst>
-          </a:blip>
-          <a:stretch>
-            <a:fillRect/>
-          </a:stretch>
-        </p:blipFill>
-        <p:spPr>
-          <a:xfrm>
-            <a:off x="9537062" y="4117936"/>
-            <a:ext cx="2634618" cy="2634618"/>
-          </a:xfrm>
-          <a:prstGeom prst="rect">
-            <a:avLst/>
-          </a:prstGeom>
-        </p:spPr>
-      </p:pic>
     </p:spTree>
     <p:extLst>
       <p:ext uri="{BB962C8B-B14F-4D97-AF65-F5344CB8AC3E}">
@@ -4082,7 +4054,7 @@
         <p:spPr>
           <a:xfrm>
             <a:off x="838200" y="1825625"/>
-            <a:ext cx="7604464" cy="2543175"/>
+            <a:ext cx="7657730" cy="2799641"/>
           </a:xfrm>
           <a:solidFill>
             <a:schemeClr val="tx2">
@@ -4092,7 +4064,7 @@
         </p:spPr>
         <p:txBody>
           <a:bodyPr>
-            <a:normAutofit/>
+            <a:normAutofit fontScale="92500" lnSpcReduction="20000"/>
           </a:bodyPr>
           <a:lstStyle/>
           <a:p>
@@ -4105,7 +4077,7 @@
                   <a:schemeClr val="bg1"/>
                 </a:solidFill>
               </a:rPr>
-              <a:t>Данные зашумленные: в видео есть блики, тени, перекрытия.</a:t>
+              <a:t>Данные зашумленные: в видео есть блики, тени, перекрытия. Также они все повернуты на 90 градусов.</a:t>
             </a:r>
           </a:p>
           <a:p>
@@ -4134,7 +4106,44 @@
                   <a:schemeClr val="bg1"/>
                 </a:solidFill>
               </a:rPr>
-              <a:t> тоже имеют ошибки: где-то ошибка в колонке, где-то есть </a:t>
+              <a:t> с данными тоже имеют ошибки: где-то опечатка в колонке, где-то есть </a:t>
+            </a:r>
+            <a:r>
+              <a:rPr lang="en-US" b="1" dirty="0" err="1">
+                <a:solidFill>
+                  <a:schemeClr val="bg1"/>
+                </a:solidFill>
+              </a:rPr>
+              <a:t>NaN</a:t>
+            </a:r>
+            <a:r>
+              <a:rPr lang="ru-RU" b="1" dirty="0">
+                <a:solidFill>
+                  <a:schemeClr val="bg1"/>
+                </a:solidFill>
+              </a:rPr>
+              <a:t>. Всё это подвергается предобработке.</a:t>
+            </a:r>
+          </a:p>
+          <a:p>
+            <a:pPr marL="0" indent="0">
+              <a:buNone/>
+            </a:pPr>
+            <a:r>
+              <a:rPr lang="ru-RU" b="1" dirty="0">
+                <a:solidFill>
+                  <a:schemeClr val="bg1"/>
+                </a:solidFill>
+              </a:rPr>
+              <a:t>Также нами добавлены данные из </a:t>
+            </a:r>
+            <a:r>
+              <a:rPr lang="en-US" b="1" dirty="0" err="1">
+                <a:solidFill>
+                  <a:schemeClr val="bg1"/>
+                </a:solidFill>
+              </a:rPr>
+              <a:t>Roboflow</a:t>
             </a:r>
             <a:r>
               <a:rPr lang="en-US" b="1" dirty="0">
@@ -4142,7 +4151,7 @@
                   <a:schemeClr val="bg1"/>
                 </a:solidFill>
               </a:rPr>
-              <a:t>nan</a:t>
+              <a:t> </a:t>
             </a:r>
             <a:r>
               <a:rPr lang="ru-RU" b="1" dirty="0">
@@ -4150,7 +4159,47 @@
                   <a:schemeClr val="bg1"/>
                 </a:solidFill>
               </a:rPr>
-              <a:t>. Всё это подвергается предобработке.</a:t>
+              <a:t>и </a:t>
+            </a:r>
+            <a:r>
+              <a:rPr lang="en-US" b="1" dirty="0" err="1">
+                <a:solidFill>
+                  <a:schemeClr val="bg1"/>
+                </a:solidFill>
+              </a:rPr>
+              <a:t>HuggingFace</a:t>
+            </a:r>
+            <a:r>
+              <a:rPr lang="en-US" b="1" dirty="0">
+                <a:solidFill>
+                  <a:schemeClr val="bg1"/>
+                </a:solidFill>
+              </a:rPr>
+              <a:t> </a:t>
+            </a:r>
+            <a:r>
+              <a:rPr lang="ru-RU" b="1" dirty="0">
+                <a:solidFill>
+                  <a:schemeClr val="bg1"/>
+                </a:solidFill>
+              </a:rPr>
+              <a:t>для расширения </a:t>
+            </a:r>
+            <a:r>
+              <a:rPr lang="ru-RU" b="1" dirty="0" err="1">
+                <a:solidFill>
+                  <a:schemeClr val="bg1"/>
+                </a:solidFill>
+              </a:rPr>
+              <a:t>датасета</a:t>
+            </a:r>
+            <a:r>
+              <a:rPr lang="ru-RU" b="1" dirty="0">
+                <a:solidFill>
+                  <a:schemeClr val="bg1"/>
+                </a:solidFill>
+              </a:rPr>
+              <a:t>. </a:t>
             </a:r>
           </a:p>
         </p:txBody>
@@ -4226,7 +4275,7 @@
                   <a:schemeClr val="bg1"/>
                 </a:solidFill>
               </a:rPr>
-              <a:t>Анализ входных данных</a:t>
+              <a:t>Архитектура решения</a:t>
             </a:r>
           </a:p>
         </p:txBody>
@@ -4250,7 +4299,7 @@
         <p:spPr>
           <a:xfrm>
             <a:off x="838200" y="1825625"/>
-            <a:ext cx="7604464" cy="2543175"/>
+            <a:ext cx="10835936" cy="2320247"/>
           </a:xfrm>
           <a:solidFill>
             <a:schemeClr val="tx2">
@@ -4273,7 +4322,23 @@
                   <a:schemeClr val="bg1"/>
                 </a:solidFill>
               </a:rPr>
-              <a:t>Данные зашумленные: в видео есть блики, тени, перекрытия.</a:t>
+              <a:t>Наш </a:t>
+            </a:r>
+            <a:r>
+              <a:rPr lang="ru-RU" b="1" dirty="0" err="1">
+                <a:solidFill>
+                  <a:schemeClr val="bg1"/>
+                </a:solidFill>
+              </a:rPr>
+              <a:t>пайплайн</a:t>
+            </a:r>
+            <a:r>
+              <a:rPr lang="ru-RU" b="1" dirty="0">
+                <a:solidFill>
+                  <a:schemeClr val="bg1"/>
+                </a:solidFill>
+              </a:rPr>
+              <a:t> состоит из:</a:t>
             </a:r>
           </a:p>
           <a:p>
@@ -4281,45 +4346,50 @@
               <a:buNone/>
             </a:pPr>
             <a:r>
-              <a:rPr lang="ru-RU" b="1" dirty="0">
-                <a:solidFill>
-                  <a:schemeClr val="bg1"/>
-                </a:solidFill>
-              </a:rPr>
-              <a:t>Сами </a:t>
-            </a:r>
-            <a:r>
-              <a:rPr lang="ru-RU" b="1" dirty="0" err="1">
-                <a:solidFill>
-                  <a:schemeClr val="bg1"/>
-                </a:solidFill>
-              </a:rPr>
-              <a:t>датафреймы</a:t>
-            </a:r>
-            <a:r>
-              <a:rPr lang="ru-RU" b="1" dirty="0">
-                <a:solidFill>
-                  <a:schemeClr val="bg1"/>
-                </a:solidFill>
-              </a:rPr>
-              <a:t> тоже имеют ошибки: где-то ошибка в колонке, где-то есть </a:t>
-            </a:r>
-            <a:r>
               <a:rPr lang="en-US" b="1" dirty="0">
                 <a:solidFill>
                   <a:schemeClr val="bg1"/>
                 </a:solidFill>
               </a:rPr>
-              <a:t>nan</a:t>
-            </a:r>
-            <a:r>
-              <a:rPr lang="ru-RU" b="1" dirty="0">
-                <a:solidFill>
-                  <a:schemeClr val="bg1"/>
-                </a:solidFill>
-              </a:rPr>
-              <a:t>. Всё это подвергается предобработке.</a:t>
-            </a:r>
+              <a:t>Preprocessing Data -&gt; Detector(YOLOv11) -&gt; Crop Images -&gt; OCR + QR (</a:t>
+            </a:r>
+            <a:r>
+              <a:rPr lang="en-US" b="1" dirty="0" err="1">
+                <a:solidFill>
+                  <a:schemeClr val="bg1"/>
+                </a:solidFill>
+              </a:rPr>
+              <a:t>PaddleOCR</a:t>
+            </a:r>
+            <a:r>
+              <a:rPr lang="en-US" b="1" dirty="0">
+                <a:solidFill>
+                  <a:schemeClr val="bg1"/>
+                </a:solidFill>
+              </a:rPr>
+              <a:t> + </a:t>
+            </a:r>
+            <a:r>
+              <a:rPr lang="en-US" b="1" dirty="0" err="1">
+                <a:solidFill>
+                  <a:schemeClr val="bg1"/>
+                </a:solidFill>
+              </a:rPr>
+              <a:t>pyzbar</a:t>
+            </a:r>
+            <a:r>
+              <a:rPr lang="en-US" b="1" dirty="0">
+                <a:solidFill>
+                  <a:schemeClr val="bg1"/>
+                </a:solidFill>
+              </a:rPr>
+              <a:t>) -&gt; Result csv</a:t>
+            </a:r>
+            <a:endParaRPr lang="ru-RU" b="1" dirty="0">
+              <a:solidFill>
+                <a:schemeClr val="bg1"/>
+              </a:solidFill>
+            </a:endParaRPr>
           </a:p>
         </p:txBody>
       </p:sp>
@@ -4327,6 +4397,927 @@
     <p:extLst>
       <p:ext uri="{BB962C8B-B14F-4D97-AF65-F5344CB8AC3E}">
         <p14:creationId xmlns:p14="http://schemas.microsoft.com/office/powerpoint/2010/main" val="1701361255"/>
+      </p:ext>
+    </p:extLst>
+  </p:cSld>
+  <p:clrMapOvr>
+    <a:masterClrMapping/>
+  </p:clrMapOvr>
+</p:sld>
+</file>
+
+<file path=ppt/slides/slide6.xml><?xml version="1.0" encoding="utf-8"?>
+<p:sld xmlns:a="http://schemas.openxmlformats.org/drawingml/2006/main" xmlns:r="http://schemas.openxmlformats.org/officeDocument/2006/relationships" xmlns:p="http://schemas.openxmlformats.org/presentationml/2006/main">
+  <p:cSld>
+    <p:bg>
+      <p:bgPr>
+        <a:blipFill dpi="0" rotWithShape="1">
+          <a:blip r:embed="rId2">
+            <a:lum/>
+          </a:blip>
+          <a:srcRect/>
+          <a:stretch>
+            <a:fillRect l="-76000" r="-76000"/>
+          </a:stretch>
+        </a:blipFill>
+        <a:effectLst/>
+      </p:bgPr>
+    </p:bg>
+    <p:spTree>
+      <p:nvGrpSpPr>
+        <p:cNvPr id="1" name=""/>
+        <p:cNvGrpSpPr/>
+        <p:nvPr/>
+      </p:nvGrpSpPr>
+      <p:grpSpPr>
+        <a:xfrm>
+          <a:off x="0" y="0"/>
+          <a:ext cx="0" cy="0"/>
+          <a:chOff x="0" y="0"/>
+          <a:chExt cx="0" cy="0"/>
+        </a:xfrm>
+      </p:grpSpPr>
+      <p:sp>
+        <p:nvSpPr>
+          <p:cNvPr id="2" name="Заголовок 1">
+            <a:extLst>
+              <a:ext uri="{FF2B5EF4-FFF2-40B4-BE49-F238E27FC236}">
+                <a16:creationId xmlns:a16="http://schemas.microsoft.com/office/drawing/2014/main" id="{7BA86A22-1E24-41DB-BC37-A62016C6214B}"/>
+              </a:ext>
+            </a:extLst>
+          </p:cNvPr>
+          <p:cNvSpPr>
+            <a:spLocks noGrp="1"/>
+          </p:cNvSpPr>
+          <p:nvPr>
+            <p:ph type="title"/>
+          </p:nvPr>
+        </p:nvSpPr>
+        <p:spPr/>
+        <p:txBody>
+          <a:bodyPr/>
+          <a:lstStyle/>
+          <a:p>
+            <a:r>
+              <a:rPr lang="en-US" b="1" dirty="0">
+                <a:solidFill>
+                  <a:schemeClr val="bg1"/>
+                </a:solidFill>
+              </a:rPr>
+              <a:t>Preprocessing Data</a:t>
+            </a:r>
+            <a:endParaRPr lang="ru-RU" b="1" dirty="0">
+              <a:solidFill>
+                <a:schemeClr val="bg1"/>
+              </a:solidFill>
+            </a:endParaRPr>
+          </a:p>
+        </p:txBody>
+      </p:sp>
+      <p:sp>
+        <p:nvSpPr>
+          <p:cNvPr id="3" name="Подзаголовок 2">
+            <a:extLst>
+              <a:ext uri="{FF2B5EF4-FFF2-40B4-BE49-F238E27FC236}">
+                <a16:creationId xmlns:a16="http://schemas.microsoft.com/office/drawing/2014/main" id="{0FCF29EE-901C-4364-8E21-880CC0178418}"/>
+              </a:ext>
+            </a:extLst>
+          </p:cNvPr>
+          <p:cNvSpPr>
+            <a:spLocks noGrp="1"/>
+          </p:cNvSpPr>
+          <p:nvPr>
+            <p:ph idx="1"/>
+          </p:nvPr>
+        </p:nvSpPr>
+        <p:spPr>
+          <a:xfrm>
+            <a:off x="838200" y="1825625"/>
+            <a:ext cx="10596239" cy="2870662"/>
+          </a:xfrm>
+          <a:solidFill>
+            <a:schemeClr val="tx2">
+              <a:alpha val="51000"/>
+            </a:schemeClr>
+          </a:solidFill>
+        </p:spPr>
+        <p:txBody>
+          <a:bodyPr>
+            <a:normAutofit/>
+          </a:bodyPr>
+          <a:lstStyle/>
+          <a:p>
+            <a:pPr marL="0" indent="0">
+              <a:buNone/>
+            </a:pPr>
+            <a:r>
+              <a:rPr lang="ru-RU" b="1" dirty="0">
+                <a:solidFill>
+                  <a:schemeClr val="bg1"/>
+                </a:solidFill>
+              </a:rPr>
+              <a:t>Видео, данные для обучающей выборки </a:t>
+            </a:r>
+            <a:r>
+              <a:rPr lang="ru-RU" b="1" dirty="0" err="1">
+                <a:solidFill>
+                  <a:schemeClr val="bg1"/>
+                </a:solidFill>
+              </a:rPr>
+              <a:t>хакатоном</a:t>
+            </a:r>
+            <a:r>
+              <a:rPr lang="ru-RU" b="1" dirty="0">
+                <a:solidFill>
+                  <a:schemeClr val="bg1"/>
+                </a:solidFill>
+              </a:rPr>
+              <a:t>, необходимо повернуть на 90 градусов. Затем в </a:t>
+            </a:r>
+            <a:r>
+              <a:rPr lang="en-US" b="1" dirty="0">
+                <a:solidFill>
+                  <a:schemeClr val="bg1"/>
+                </a:solidFill>
+              </a:rPr>
+              <a:t>csv </a:t>
+            </a:r>
+            <a:r>
+              <a:rPr lang="ru-RU" b="1" dirty="0">
+                <a:solidFill>
+                  <a:schemeClr val="bg1"/>
+                </a:solidFill>
+              </a:rPr>
+              <a:t>для каждого видео в столбце </a:t>
+            </a:r>
+            <a:r>
+              <a:rPr lang="en-US" b="1" dirty="0" err="1">
+                <a:solidFill>
+                  <a:schemeClr val="bg1"/>
+                </a:solidFill>
+              </a:rPr>
+              <a:t>frame_timestamp</a:t>
+            </a:r>
+            <a:r>
+              <a:rPr lang="en-US" b="1" dirty="0">
+                <a:solidFill>
+                  <a:schemeClr val="bg1"/>
+                </a:solidFill>
+              </a:rPr>
+              <a:t> </a:t>
+            </a:r>
+            <a:r>
+              <a:rPr lang="ru-RU" b="1" dirty="0">
+                <a:solidFill>
+                  <a:schemeClr val="bg1"/>
+                </a:solidFill>
+              </a:rPr>
+              <a:t>указано время после начала записи видео, используем его для того, чтобы порезать видео на фреймы с указанными </a:t>
+            </a:r>
+            <a:r>
+              <a:rPr lang="en-US" b="1" dirty="0" err="1">
+                <a:solidFill>
+                  <a:schemeClr val="bg1"/>
+                </a:solidFill>
+              </a:rPr>
+              <a:t>bboxes</a:t>
+            </a:r>
+            <a:r>
+              <a:rPr lang="en-US" b="1" dirty="0">
+                <a:solidFill>
+                  <a:schemeClr val="bg1"/>
+                </a:solidFill>
+              </a:rPr>
+              <a:t>. </a:t>
+            </a:r>
+            <a:r>
+              <a:rPr lang="ru-RU" b="1" dirty="0">
+                <a:solidFill>
+                  <a:schemeClr val="bg1"/>
+                </a:solidFill>
+              </a:rPr>
+              <a:t>Также заданные координаты </a:t>
+            </a:r>
+            <a:r>
+              <a:rPr lang="en-US" b="1" dirty="0" err="1">
+                <a:solidFill>
+                  <a:schemeClr val="bg1"/>
+                </a:solidFill>
+              </a:rPr>
+              <a:t>x_min</a:t>
+            </a:r>
+            <a:r>
+              <a:rPr lang="en-US" b="1" dirty="0">
+                <a:solidFill>
+                  <a:schemeClr val="bg1"/>
+                </a:solidFill>
+              </a:rPr>
+              <a:t>, </a:t>
+            </a:r>
+            <a:r>
+              <a:rPr lang="en-US" b="1" dirty="0" err="1">
+                <a:solidFill>
+                  <a:schemeClr val="bg1"/>
+                </a:solidFill>
+              </a:rPr>
+              <a:t>y_min</a:t>
+            </a:r>
+            <a:r>
+              <a:rPr lang="en-US" b="1" dirty="0">
+                <a:solidFill>
+                  <a:schemeClr val="bg1"/>
+                </a:solidFill>
+              </a:rPr>
+              <a:t>, </a:t>
+            </a:r>
+            <a:r>
+              <a:rPr lang="en-US" b="1" dirty="0" err="1">
+                <a:solidFill>
+                  <a:schemeClr val="bg1"/>
+                </a:solidFill>
+              </a:rPr>
+              <a:t>x_max</a:t>
+            </a:r>
+            <a:r>
+              <a:rPr lang="en-US" b="1" dirty="0">
+                <a:solidFill>
+                  <a:schemeClr val="bg1"/>
+                </a:solidFill>
+              </a:rPr>
+              <a:t>, </a:t>
+            </a:r>
+            <a:r>
+              <a:rPr lang="en-US" b="1" dirty="0" err="1">
+                <a:solidFill>
+                  <a:schemeClr val="bg1"/>
+                </a:solidFill>
+              </a:rPr>
+              <a:t>y_max</a:t>
+            </a:r>
+            <a:r>
+              <a:rPr lang="en-US" b="1" dirty="0">
+                <a:solidFill>
+                  <a:schemeClr val="bg1"/>
+                </a:solidFill>
+              </a:rPr>
+              <a:t> </a:t>
+            </a:r>
+            <a:r>
+              <a:rPr lang="ru-RU" b="1" dirty="0">
+                <a:solidFill>
+                  <a:schemeClr val="bg1"/>
+                </a:solidFill>
+              </a:rPr>
+              <a:t>необходимо преобразовать к </a:t>
+            </a:r>
+            <a:r>
+              <a:rPr lang="en-US" b="1" dirty="0">
+                <a:solidFill>
+                  <a:schemeClr val="bg1"/>
+                </a:solidFill>
+              </a:rPr>
+              <a:t>YOLO</a:t>
+            </a:r>
+            <a:r>
+              <a:rPr lang="ru-RU" b="1" dirty="0">
+                <a:solidFill>
+                  <a:schemeClr val="bg1"/>
+                </a:solidFill>
+              </a:rPr>
+              <a:t>-формату: </a:t>
+            </a:r>
+            <a:r>
+              <a:rPr lang="en-US" b="1" dirty="0" err="1">
+                <a:solidFill>
+                  <a:schemeClr val="bg1"/>
+                </a:solidFill>
+              </a:rPr>
+              <a:t>x_center</a:t>
+            </a:r>
+            <a:r>
+              <a:rPr lang="en-US" b="1" dirty="0">
+                <a:solidFill>
+                  <a:schemeClr val="bg1"/>
+                </a:solidFill>
+              </a:rPr>
+              <a:t>, </a:t>
+            </a:r>
+            <a:r>
+              <a:rPr lang="en-US" b="1" dirty="0" err="1">
+                <a:solidFill>
+                  <a:schemeClr val="bg1"/>
+                </a:solidFill>
+              </a:rPr>
+              <a:t>y_center</a:t>
+            </a:r>
+            <a:r>
+              <a:rPr lang="en-US" b="1" dirty="0">
+                <a:solidFill>
+                  <a:schemeClr val="bg1"/>
+                </a:solidFill>
+              </a:rPr>
+              <a:t>, width, height. </a:t>
+            </a:r>
+            <a:endParaRPr lang="ru-RU" b="1" dirty="0">
+              <a:solidFill>
+                <a:schemeClr val="bg1"/>
+              </a:solidFill>
+            </a:endParaRPr>
+          </a:p>
+        </p:txBody>
+      </p:sp>
+    </p:spTree>
+    <p:extLst>
+      <p:ext uri="{BB962C8B-B14F-4D97-AF65-F5344CB8AC3E}">
+        <p14:creationId xmlns:p14="http://schemas.microsoft.com/office/powerpoint/2010/main" val="3278400276"/>
+      </p:ext>
+    </p:extLst>
+  </p:cSld>
+  <p:clrMapOvr>
+    <a:masterClrMapping/>
+  </p:clrMapOvr>
+</p:sld>
+</file>
+
+<file path=ppt/slides/slide7.xml><?xml version="1.0" encoding="utf-8"?>
+<p:sld xmlns:a="http://schemas.openxmlformats.org/drawingml/2006/main" xmlns:r="http://schemas.openxmlformats.org/officeDocument/2006/relationships" xmlns:p="http://schemas.openxmlformats.org/presentationml/2006/main">
+  <p:cSld>
+    <p:bg>
+      <p:bgPr>
+        <a:blipFill dpi="0" rotWithShape="1">
+          <a:blip r:embed="rId2">
+            <a:lum/>
+          </a:blip>
+          <a:srcRect/>
+          <a:stretch>
+            <a:fillRect l="-76000" r="-76000"/>
+          </a:stretch>
+        </a:blipFill>
+        <a:effectLst/>
+      </p:bgPr>
+    </p:bg>
+    <p:spTree>
+      <p:nvGrpSpPr>
+        <p:cNvPr id="1" name=""/>
+        <p:cNvGrpSpPr/>
+        <p:nvPr/>
+      </p:nvGrpSpPr>
+      <p:grpSpPr>
+        <a:xfrm>
+          <a:off x="0" y="0"/>
+          <a:ext cx="0" cy="0"/>
+          <a:chOff x="0" y="0"/>
+          <a:chExt cx="0" cy="0"/>
+        </a:xfrm>
+      </p:grpSpPr>
+      <p:sp>
+        <p:nvSpPr>
+          <p:cNvPr id="2" name="Заголовок 1">
+            <a:extLst>
+              <a:ext uri="{FF2B5EF4-FFF2-40B4-BE49-F238E27FC236}">
+                <a16:creationId xmlns:a16="http://schemas.microsoft.com/office/drawing/2014/main" id="{7BA86A22-1E24-41DB-BC37-A62016C6214B}"/>
+              </a:ext>
+            </a:extLst>
+          </p:cNvPr>
+          <p:cNvSpPr>
+            <a:spLocks noGrp="1"/>
+          </p:cNvSpPr>
+          <p:nvPr>
+            <p:ph type="title"/>
+          </p:nvPr>
+        </p:nvSpPr>
+        <p:spPr/>
+        <p:txBody>
+          <a:bodyPr/>
+          <a:lstStyle/>
+          <a:p>
+            <a:r>
+              <a:rPr lang="ru-RU" b="1" dirty="0">
+                <a:solidFill>
+                  <a:schemeClr val="bg1"/>
+                </a:solidFill>
+              </a:rPr>
+              <a:t>Детектор</a:t>
+            </a:r>
+          </a:p>
+        </p:txBody>
+      </p:sp>
+      <p:sp>
+        <p:nvSpPr>
+          <p:cNvPr id="3" name="Подзаголовок 2">
+            <a:extLst>
+              <a:ext uri="{FF2B5EF4-FFF2-40B4-BE49-F238E27FC236}">
+                <a16:creationId xmlns:a16="http://schemas.microsoft.com/office/drawing/2014/main" id="{0FCF29EE-901C-4364-8E21-880CC0178418}"/>
+              </a:ext>
+            </a:extLst>
+          </p:cNvPr>
+          <p:cNvSpPr>
+            <a:spLocks noGrp="1"/>
+          </p:cNvSpPr>
+          <p:nvPr>
+            <p:ph idx="1"/>
+          </p:nvPr>
+        </p:nvSpPr>
+        <p:spPr>
+          <a:xfrm>
+            <a:off x="838200" y="1825624"/>
+            <a:ext cx="10986856" cy="3696287"/>
+          </a:xfrm>
+          <a:solidFill>
+            <a:schemeClr val="tx2">
+              <a:alpha val="51000"/>
+            </a:schemeClr>
+          </a:solidFill>
+        </p:spPr>
+        <p:txBody>
+          <a:bodyPr>
+            <a:normAutofit/>
+          </a:bodyPr>
+          <a:lstStyle/>
+          <a:p>
+            <a:pPr marL="0" indent="0">
+              <a:buNone/>
+            </a:pPr>
+            <a:r>
+              <a:rPr lang="ru-RU" b="1" dirty="0">
+                <a:solidFill>
+                  <a:schemeClr val="bg1"/>
+                </a:solidFill>
+              </a:rPr>
+              <a:t>Для детекции мы использовали </a:t>
+            </a:r>
+            <a:r>
+              <a:rPr lang="en-US" b="1" dirty="0">
+                <a:solidFill>
+                  <a:schemeClr val="bg1"/>
+                </a:solidFill>
+              </a:rPr>
+              <a:t>yolov11s</a:t>
+            </a:r>
+            <a:r>
+              <a:rPr lang="ru-RU" b="1" dirty="0">
+                <a:solidFill>
+                  <a:schemeClr val="bg1"/>
+                </a:solidFill>
+              </a:rPr>
+              <a:t>, упор был на то, чтобы модель была не тяжеловесной и могла быстрее работать в </a:t>
+            </a:r>
+            <a:r>
+              <a:rPr lang="en-US" b="1" dirty="0">
+                <a:solidFill>
+                  <a:schemeClr val="bg1"/>
+                </a:solidFill>
+              </a:rPr>
+              <a:t>real-time </a:t>
+            </a:r>
+            <a:r>
+              <a:rPr lang="ru-RU" b="1" dirty="0" err="1">
+                <a:solidFill>
+                  <a:schemeClr val="bg1"/>
+                </a:solidFill>
+              </a:rPr>
+              <a:t>инференсе</a:t>
+            </a:r>
+            <a:r>
+              <a:rPr lang="en-US" b="1" dirty="0">
+                <a:solidFill>
+                  <a:schemeClr val="bg1"/>
+                </a:solidFill>
+              </a:rPr>
+              <a:t>.</a:t>
+            </a:r>
+            <a:r>
+              <a:rPr lang="ru-RU" b="1" dirty="0">
+                <a:solidFill>
+                  <a:schemeClr val="bg1"/>
+                </a:solidFill>
+              </a:rPr>
+              <a:t> Для обучения мы используем небольшие аугментации: повороты на несколько градусов, перспективу, масштаб и т.д. </a:t>
+            </a:r>
+          </a:p>
+          <a:p>
+            <a:pPr marL="0" indent="0">
+              <a:buNone/>
+            </a:pPr>
+            <a:r>
+              <a:rPr lang="ru-RU" b="1" dirty="0">
+                <a:solidFill>
+                  <a:schemeClr val="bg1"/>
+                </a:solidFill>
+              </a:rPr>
+              <a:t>Важно не переборщить с аугментациями, т.к. ценник объект маленький, с ним настраивать нужно аккуратно. </a:t>
+            </a:r>
+          </a:p>
+          <a:p>
+            <a:pPr marL="0" indent="0">
+              <a:buNone/>
+            </a:pPr>
+            <a:r>
+              <a:rPr lang="ru-RU" b="1" dirty="0">
+                <a:solidFill>
+                  <a:schemeClr val="bg1"/>
+                </a:solidFill>
+              </a:rPr>
+              <a:t>Итоговые метрики</a:t>
+            </a:r>
+            <a:r>
+              <a:rPr lang="en-US" b="1" dirty="0">
+                <a:solidFill>
+                  <a:schemeClr val="bg1"/>
+                </a:solidFill>
+              </a:rPr>
+              <a:t>:</a:t>
+            </a:r>
+            <a:r>
+              <a:rPr lang="ru-RU" b="1" dirty="0">
+                <a:solidFill>
+                  <a:schemeClr val="bg1"/>
+                </a:solidFill>
+              </a:rPr>
+              <a:t> </a:t>
+            </a:r>
+            <a:r>
+              <a:rPr lang="en-US" b="1" dirty="0">
+                <a:solidFill>
+                  <a:schemeClr val="bg1"/>
+                </a:solidFill>
+              </a:rPr>
+              <a:t>mAP50 = 0.75, mAP50-95 = 0.55, Precision = 0.64, Recall = 0.84. </a:t>
+            </a:r>
+          </a:p>
+          <a:p>
+            <a:pPr marL="0" indent="0">
+              <a:buNone/>
+            </a:pPr>
+            <a:endParaRPr lang="ru-RU" b="1" dirty="0">
+              <a:solidFill>
+                <a:schemeClr val="bg1"/>
+              </a:solidFill>
+            </a:endParaRPr>
+          </a:p>
+        </p:txBody>
+      </p:sp>
+    </p:spTree>
+    <p:extLst>
+      <p:ext uri="{BB962C8B-B14F-4D97-AF65-F5344CB8AC3E}">
+        <p14:creationId xmlns:p14="http://schemas.microsoft.com/office/powerpoint/2010/main" val="250624418"/>
+      </p:ext>
+    </p:extLst>
+  </p:cSld>
+  <p:clrMapOvr>
+    <a:masterClrMapping/>
+  </p:clrMapOvr>
+</p:sld>
+</file>
+
+<file path=ppt/slides/slide8.xml><?xml version="1.0" encoding="utf-8"?>
+<p:sld xmlns:a="http://schemas.openxmlformats.org/drawingml/2006/main" xmlns:r="http://schemas.openxmlformats.org/officeDocument/2006/relationships" xmlns:p="http://schemas.openxmlformats.org/presentationml/2006/main">
+  <p:cSld>
+    <p:bg>
+      <p:bgPr>
+        <a:blipFill dpi="0" rotWithShape="1">
+          <a:blip r:embed="rId2">
+            <a:lum/>
+          </a:blip>
+          <a:srcRect/>
+          <a:stretch>
+            <a:fillRect l="-76000" r="-76000"/>
+          </a:stretch>
+        </a:blipFill>
+        <a:effectLst/>
+      </p:bgPr>
+    </p:bg>
+    <p:spTree>
+      <p:nvGrpSpPr>
+        <p:cNvPr id="1" name=""/>
+        <p:cNvGrpSpPr/>
+        <p:nvPr/>
+      </p:nvGrpSpPr>
+      <p:grpSpPr>
+        <a:xfrm>
+          <a:off x="0" y="0"/>
+          <a:ext cx="0" cy="0"/>
+          <a:chOff x="0" y="0"/>
+          <a:chExt cx="0" cy="0"/>
+        </a:xfrm>
+      </p:grpSpPr>
+      <p:sp>
+        <p:nvSpPr>
+          <p:cNvPr id="2" name="Заголовок 1">
+            <a:extLst>
+              <a:ext uri="{FF2B5EF4-FFF2-40B4-BE49-F238E27FC236}">
+                <a16:creationId xmlns:a16="http://schemas.microsoft.com/office/drawing/2014/main" id="{7BA86A22-1E24-41DB-BC37-A62016C6214B}"/>
+              </a:ext>
+            </a:extLst>
+          </p:cNvPr>
+          <p:cNvSpPr>
+            <a:spLocks noGrp="1"/>
+          </p:cNvSpPr>
+          <p:nvPr>
+            <p:ph type="title"/>
+          </p:nvPr>
+        </p:nvSpPr>
+        <p:spPr/>
+        <p:txBody>
+          <a:bodyPr/>
+          <a:lstStyle/>
+          <a:p>
+            <a:r>
+              <a:rPr lang="en-US" b="1" dirty="0">
+                <a:solidFill>
+                  <a:schemeClr val="bg1"/>
+                </a:solidFill>
+              </a:rPr>
+              <a:t>OCR</a:t>
+            </a:r>
+            <a:endParaRPr lang="ru-RU" b="1" dirty="0">
+              <a:solidFill>
+                <a:schemeClr val="bg1"/>
+              </a:solidFill>
+            </a:endParaRPr>
+          </a:p>
+        </p:txBody>
+      </p:sp>
+      <p:sp>
+        <p:nvSpPr>
+          <p:cNvPr id="3" name="Подзаголовок 2">
+            <a:extLst>
+              <a:ext uri="{FF2B5EF4-FFF2-40B4-BE49-F238E27FC236}">
+                <a16:creationId xmlns:a16="http://schemas.microsoft.com/office/drawing/2014/main" id="{0FCF29EE-901C-4364-8E21-880CC0178418}"/>
+              </a:ext>
+            </a:extLst>
+          </p:cNvPr>
+          <p:cNvSpPr>
+            <a:spLocks noGrp="1"/>
+          </p:cNvSpPr>
+          <p:nvPr>
+            <p:ph idx="1"/>
+          </p:nvPr>
+        </p:nvSpPr>
+        <p:spPr>
+          <a:xfrm>
+            <a:off x="838200" y="1825625"/>
+            <a:ext cx="10835936" cy="2320247"/>
+          </a:xfrm>
+          <a:solidFill>
+            <a:schemeClr val="tx2">
+              <a:alpha val="51000"/>
+            </a:schemeClr>
+          </a:solidFill>
+        </p:spPr>
+        <p:txBody>
+          <a:bodyPr>
+            <a:normAutofit/>
+          </a:bodyPr>
+          <a:lstStyle/>
+          <a:p>
+            <a:pPr marL="0" indent="0">
+              <a:buNone/>
+            </a:pPr>
+            <a:r>
+              <a:rPr lang="ru-RU" b="1" dirty="0">
+                <a:solidFill>
+                  <a:schemeClr val="bg1"/>
+                </a:solidFill>
+              </a:rPr>
+              <a:t>Для </a:t>
+            </a:r>
+            <a:r>
+              <a:rPr lang="en-US" b="1" dirty="0">
+                <a:solidFill>
+                  <a:schemeClr val="bg1"/>
+                </a:solidFill>
+              </a:rPr>
+              <a:t>OCR </a:t>
+            </a:r>
+            <a:r>
+              <a:rPr lang="ru-RU" b="1" dirty="0">
+                <a:solidFill>
+                  <a:schemeClr val="bg1"/>
+                </a:solidFill>
+              </a:rPr>
+              <a:t>было решено использовать модель </a:t>
+            </a:r>
+            <a:r>
+              <a:rPr lang="en-US" b="1" dirty="0" err="1">
+                <a:solidFill>
+                  <a:schemeClr val="bg1"/>
+                </a:solidFill>
+              </a:rPr>
+              <a:t>PaddleOCR</a:t>
+            </a:r>
+            <a:r>
+              <a:rPr lang="en-US" b="1" dirty="0">
+                <a:solidFill>
+                  <a:schemeClr val="bg1"/>
+                </a:solidFill>
+              </a:rPr>
+              <a:t>, </a:t>
+            </a:r>
+            <a:r>
+              <a:rPr lang="ru-RU" b="1" dirty="0">
+                <a:solidFill>
+                  <a:schemeClr val="bg1"/>
+                </a:solidFill>
+              </a:rPr>
+              <a:t>т.к. он показал себя лучше в распознавании текста. После детекции делаем </a:t>
+            </a:r>
+            <a:r>
+              <a:rPr lang="ru-RU" b="1" dirty="0" err="1">
+                <a:solidFill>
+                  <a:schemeClr val="bg1"/>
+                </a:solidFill>
+              </a:rPr>
+              <a:t>кроп</a:t>
+            </a:r>
+            <a:r>
+              <a:rPr lang="ru-RU" b="1" dirty="0">
+                <a:solidFill>
+                  <a:schemeClr val="bg1"/>
+                </a:solidFill>
+              </a:rPr>
+              <a:t> изображения, </a:t>
+            </a:r>
+            <a:r>
+              <a:rPr lang="ru-RU" b="1" dirty="0" err="1">
+                <a:solidFill>
+                  <a:schemeClr val="bg1"/>
+                </a:solidFill>
+              </a:rPr>
+              <a:t>ресайзим</a:t>
+            </a:r>
+            <a:r>
+              <a:rPr lang="ru-RU" b="1" dirty="0">
+                <a:solidFill>
+                  <a:schemeClr val="bg1"/>
+                </a:solidFill>
+              </a:rPr>
+              <a:t> его для более точного распознавания текста. Цвет ценника определяем с помощью </a:t>
+            </a:r>
+            <a:r>
+              <a:rPr lang="en-US" b="1" dirty="0">
+                <a:solidFill>
+                  <a:schemeClr val="bg1"/>
+                </a:solidFill>
+              </a:rPr>
+              <a:t>HSV. </a:t>
+            </a:r>
+            <a:r>
+              <a:rPr lang="ru-RU" b="1" dirty="0">
+                <a:solidFill>
+                  <a:schemeClr val="bg1"/>
+                </a:solidFill>
+              </a:rPr>
+              <a:t>Итог переводим в </a:t>
+            </a:r>
+            <a:r>
+              <a:rPr lang="en-US" b="1" dirty="0">
+                <a:solidFill>
+                  <a:schemeClr val="bg1"/>
+                </a:solidFill>
+              </a:rPr>
+              <a:t>submission.csv.</a:t>
+            </a:r>
+            <a:endParaRPr lang="ru-RU" b="1" dirty="0">
+              <a:solidFill>
+                <a:schemeClr val="bg1"/>
+              </a:solidFill>
+            </a:endParaRPr>
+          </a:p>
+        </p:txBody>
+      </p:sp>
+    </p:spTree>
+    <p:extLst>
+      <p:ext uri="{BB962C8B-B14F-4D97-AF65-F5344CB8AC3E}">
+        <p14:creationId xmlns:p14="http://schemas.microsoft.com/office/powerpoint/2010/main" val="654413013"/>
+      </p:ext>
+    </p:extLst>
+  </p:cSld>
+  <p:clrMapOvr>
+    <a:masterClrMapping/>
+  </p:clrMapOvr>
+</p:sld>
+</file>
+
+<file path=ppt/slides/slide9.xml><?xml version="1.0" encoding="utf-8"?>
+<p:sld xmlns:a="http://schemas.openxmlformats.org/drawingml/2006/main" xmlns:r="http://schemas.openxmlformats.org/officeDocument/2006/relationships" xmlns:p="http://schemas.openxmlformats.org/presentationml/2006/main">
+  <p:cSld>
+    <p:bg>
+      <p:bgPr>
+        <a:blipFill dpi="0" rotWithShape="1">
+          <a:blip r:embed="rId2">
+            <a:lum/>
+          </a:blip>
+          <a:srcRect/>
+          <a:stretch>
+            <a:fillRect l="-76000" r="-76000"/>
+          </a:stretch>
+        </a:blipFill>
+        <a:effectLst/>
+      </p:bgPr>
+    </p:bg>
+    <p:spTree>
+      <p:nvGrpSpPr>
+        <p:cNvPr id="1" name=""/>
+        <p:cNvGrpSpPr/>
+        <p:nvPr/>
+      </p:nvGrpSpPr>
+      <p:grpSpPr>
+        <a:xfrm>
+          <a:off x="0" y="0"/>
+          <a:ext cx="0" cy="0"/>
+          <a:chOff x="0" y="0"/>
+          <a:chExt cx="0" cy="0"/>
+        </a:xfrm>
+      </p:grpSpPr>
+      <p:sp>
+        <p:nvSpPr>
+          <p:cNvPr id="2" name="Заголовок 1">
+            <a:extLst>
+              <a:ext uri="{FF2B5EF4-FFF2-40B4-BE49-F238E27FC236}">
+                <a16:creationId xmlns:a16="http://schemas.microsoft.com/office/drawing/2014/main" id="{7BA86A22-1E24-41DB-BC37-A62016C6214B}"/>
+              </a:ext>
+            </a:extLst>
+          </p:cNvPr>
+          <p:cNvSpPr>
+            <a:spLocks noGrp="1"/>
+          </p:cNvSpPr>
+          <p:nvPr>
+            <p:ph type="title"/>
+          </p:nvPr>
+        </p:nvSpPr>
+        <p:spPr/>
+        <p:txBody>
+          <a:bodyPr/>
+          <a:lstStyle/>
+          <a:p>
+            <a:r>
+              <a:rPr lang="ru-RU" b="1" dirty="0">
+                <a:solidFill>
+                  <a:schemeClr val="bg1"/>
+                </a:solidFill>
+              </a:rPr>
+              <a:t>Ссылка на решение</a:t>
+            </a:r>
+          </a:p>
+        </p:txBody>
+      </p:sp>
+      <p:sp>
+        <p:nvSpPr>
+          <p:cNvPr id="3" name="Подзаголовок 2">
+            <a:extLst>
+              <a:ext uri="{FF2B5EF4-FFF2-40B4-BE49-F238E27FC236}">
+                <a16:creationId xmlns:a16="http://schemas.microsoft.com/office/drawing/2014/main" id="{0FCF29EE-901C-4364-8E21-880CC0178418}"/>
+              </a:ext>
+            </a:extLst>
+          </p:cNvPr>
+          <p:cNvSpPr>
+            <a:spLocks noGrp="1"/>
+          </p:cNvSpPr>
+          <p:nvPr>
+            <p:ph idx="1"/>
+          </p:nvPr>
+        </p:nvSpPr>
+        <p:spPr>
+          <a:xfrm>
+            <a:off x="838200" y="1825625"/>
+            <a:ext cx="10835936" cy="2320247"/>
+          </a:xfrm>
+          <a:solidFill>
+            <a:schemeClr val="tx2">
+              <a:alpha val="51000"/>
+            </a:schemeClr>
+          </a:solidFill>
+        </p:spPr>
+        <p:txBody>
+          <a:bodyPr>
+            <a:normAutofit/>
+          </a:bodyPr>
+          <a:lstStyle/>
+          <a:p>
+            <a:pPr marL="0" indent="0">
+              <a:buNone/>
+            </a:pPr>
+            <a:r>
+              <a:rPr lang="en-US" b="1" dirty="0">
+                <a:solidFill>
+                  <a:schemeClr val="bg1"/>
+                </a:solidFill>
+              </a:rPr>
+              <a:t>https://github.com/VladisRave/Lent_Frankenstein.git</a:t>
+            </a:r>
+            <a:endParaRPr lang="ru-RU" b="1" dirty="0">
+              <a:solidFill>
+                <a:schemeClr val="bg1"/>
+              </a:solidFill>
+            </a:endParaRPr>
+          </a:p>
+        </p:txBody>
+      </p:sp>
+    </p:spTree>
+    <p:extLst>
+      <p:ext uri="{BB962C8B-B14F-4D97-AF65-F5344CB8AC3E}">
+        <p14:creationId xmlns:p14="http://schemas.microsoft.com/office/powerpoint/2010/main" val="1520148656"/>
       </p:ext>
     </p:extLst>
   </p:cSld>
